--- a/03_Evaluation/slides/3_2_DecisionTrees.pptx
+++ b/03_Evaluation/slides/3_2_DecisionTrees.pptx
@@ -5,19 +5,18 @@
     <p:sldMasterId id="2147483648" r:id="rId1"/>
   </p:sldMasterIdLst>
   <p:notesMasterIdLst>
-    <p:notesMasterId r:id="rId12"/>
+    <p:notesMasterId r:id="rId11"/>
   </p:notesMasterIdLst>
   <p:sldIdLst>
     <p:sldId id="574" r:id="rId2"/>
-    <p:sldId id="586" r:id="rId3"/>
-    <p:sldId id="573" r:id="rId4"/>
-    <p:sldId id="575" r:id="rId5"/>
-    <p:sldId id="581" r:id="rId6"/>
-    <p:sldId id="582" r:id="rId7"/>
-    <p:sldId id="583" r:id="rId8"/>
-    <p:sldId id="584" r:id="rId9"/>
-    <p:sldId id="585" r:id="rId10"/>
-    <p:sldId id="580" r:id="rId11"/>
+    <p:sldId id="573" r:id="rId3"/>
+    <p:sldId id="575" r:id="rId4"/>
+    <p:sldId id="581" r:id="rId5"/>
+    <p:sldId id="582" r:id="rId6"/>
+    <p:sldId id="583" r:id="rId7"/>
+    <p:sldId id="584" r:id="rId8"/>
+    <p:sldId id="585" r:id="rId9"/>
+    <p:sldId id="580" r:id="rId10"/>
   </p:sldIdLst>
   <p:sldSz cx="12192000" cy="6858000"/>
   <p:notesSz cx="6858000" cy="9144000"/>
@@ -124,58 +123,20 @@
 </p:presentation>
 </file>
 
-<file path=ppt/revisionInfo.xml><?xml version="1.0" encoding="utf-8"?>
-<p1510:revInfo xmlns:a="http://schemas.openxmlformats.org/drawingml/2006/main" xmlns:r="http://schemas.openxmlformats.org/officeDocument/2006/relationships" xmlns:p1510="http://schemas.microsoft.com/office/powerpoint/2015/10/main">
-  <p1510:revLst>
-    <p1510:client id="{AE377D4B-D4C5-4D28-88F2-0BAD1AFE0B7E}" v="3" dt="2026-03-03T17:34:50.327"/>
-  </p1510:revLst>
-</p1510:revInfo>
-</file>
-
 <file path=ppt/changesInfos/changesInfo1.xml><?xml version="1.0" encoding="utf-8"?>
 <pc:chgInfo xmlns:a="http://schemas.openxmlformats.org/drawingml/2006/main" xmlns:r="http://schemas.openxmlformats.org/officeDocument/2006/relationships" xmlns:ac="http://schemas.microsoft.com/office/drawing/2013/main/command" xmlns:pc="http://schemas.microsoft.com/office/powerpoint/2013/main/command">
   <pc:docChgLst>
     <pc:chgData name="Robbin Bouwmeester" userId="1dbfebabfc25a55a" providerId="LiveId" clId="{75D63595-F797-482E-A4A0-2F4889B74D4F}"/>
     <pc:docChg chg="undo custSel addSld delSld modSld">
-      <pc:chgData name="Robbin Bouwmeester" userId="1dbfebabfc25a55a" providerId="LiveId" clId="{75D63595-F797-482E-A4A0-2F4889B74D4F}" dt="2026-03-03T17:35:37.560" v="6" actId="47"/>
+      <pc:chgData name="Robbin Bouwmeester" userId="1dbfebabfc25a55a" providerId="LiveId" clId="{75D63595-F797-482E-A4A0-2F4889B74D4F}" dt="2026-10-20T12:31:49.011" v="7" actId="47"/>
       <pc:docMkLst>
         <pc:docMk/>
       </pc:docMkLst>
-      <pc:sldChg chg="add del">
-        <pc:chgData name="Robbin Bouwmeester" userId="1dbfebabfc25a55a" providerId="LiveId" clId="{75D63595-F797-482E-A4A0-2F4889B74D4F}" dt="2026-03-03T17:35:37.560" v="6" actId="47"/>
-        <pc:sldMkLst>
-          <pc:docMk/>
-          <pc:sldMk cId="416481786" sldId="275"/>
-        </pc:sldMkLst>
-      </pc:sldChg>
-      <pc:sldChg chg="addSp new mod">
-        <pc:chgData name="Robbin Bouwmeester" userId="1dbfebabfc25a55a" providerId="LiveId" clId="{75D63595-F797-482E-A4A0-2F4889B74D4F}" dt="2026-03-03T14:36:44.577" v="4" actId="22"/>
+      <pc:sldChg chg="addSp new del mod">
+        <pc:chgData name="Robbin Bouwmeester" userId="1dbfebabfc25a55a" providerId="LiveId" clId="{75D63595-F797-482E-A4A0-2F4889B74D4F}" dt="2026-10-20T12:31:49.011" v="7" actId="47"/>
         <pc:sldMkLst>
           <pc:docMk/>
           <pc:sldMk cId="266687082" sldId="586"/>
-        </pc:sldMkLst>
-        <pc:spChg chg="add">
-          <ac:chgData name="Robbin Bouwmeester" userId="1dbfebabfc25a55a" providerId="LiveId" clId="{75D63595-F797-482E-A4A0-2F4889B74D4F}" dt="2026-03-03T14:36:36.758" v="3"/>
-          <ac:spMkLst>
-            <pc:docMk/>
-            <pc:sldMk cId="266687082" sldId="586"/>
-            <ac:spMk id="2" creationId="{7A6A0EBC-652E-E4F7-B7E9-A3B306DCD8C5}"/>
-          </ac:spMkLst>
-        </pc:spChg>
-        <pc:picChg chg="add">
-          <ac:chgData name="Robbin Bouwmeester" userId="1dbfebabfc25a55a" providerId="LiveId" clId="{75D63595-F797-482E-A4A0-2F4889B74D4F}" dt="2026-03-03T14:36:44.577" v="4" actId="22"/>
-          <ac:picMkLst>
-            <pc:docMk/>
-            <pc:sldMk cId="266687082" sldId="586"/>
-            <ac:picMk id="4" creationId="{F55D3E5B-0C9E-D2FA-AF4C-0F665D0C1D74}"/>
-          </ac:picMkLst>
-        </pc:picChg>
-      </pc:sldChg>
-      <pc:sldChg chg="new del">
-        <pc:chgData name="Robbin Bouwmeester" userId="1dbfebabfc25a55a" providerId="LiveId" clId="{75D63595-F797-482E-A4A0-2F4889B74D4F}" dt="2026-03-03T14:16:23.781" v="1" actId="680"/>
-        <pc:sldMkLst>
-          <pc:docMk/>
-          <pc:sldMk cId="3697395963" sldId="586"/>
         </pc:sldMkLst>
       </pc:sldChg>
     </pc:docChg>
@@ -265,7 +226,7 @@
           <a:p>
             <a:fld id="{5E9E4307-97E3-48E4-B22B-3E65CE2A671E}" type="datetimeFigureOut">
               <a:rPr lang="en-GB" smtClean="0"/>
-              <a:t>03/03/2026</a:t>
+              <a:t>20/10/2026</a:t>
             </a:fld>
             <a:endParaRPr lang="en-GB"/>
           </a:p>
@@ -730,7 +691,7 @@
           <a:p>
             <a:fld id="{E36C4827-840E-4EC5-B0B2-4EAAD02724FF}" type="slidenum">
               <a:rPr lang="en-US" smtClean="0"/>
-              <a:t>3</a:t>
+              <a:t>2</a:t>
             </a:fld>
             <a:endParaRPr lang="en-US"/>
           </a:p>
@@ -838,7 +799,7 @@
           <a:p>
             <a:fld id="{E36C4827-840E-4EC5-B0B2-4EAAD02724FF}" type="slidenum">
               <a:rPr lang="en-US" smtClean="0"/>
-              <a:t>4</a:t>
+              <a:t>3</a:t>
             </a:fld>
             <a:endParaRPr lang="en-US"/>
           </a:p>
@@ -946,7 +907,7 @@
           <a:p>
             <a:fld id="{E36C4827-840E-4EC5-B0B2-4EAAD02724FF}" type="slidenum">
               <a:rPr lang="en-US" smtClean="0"/>
-              <a:t>5</a:t>
+              <a:t>4</a:t>
             </a:fld>
             <a:endParaRPr lang="en-US"/>
           </a:p>
@@ -1054,7 +1015,7 @@
           <a:p>
             <a:fld id="{E36C4827-840E-4EC5-B0B2-4EAAD02724FF}" type="slidenum">
               <a:rPr lang="en-US" smtClean="0"/>
-              <a:t>6</a:t>
+              <a:t>5</a:t>
             </a:fld>
             <a:endParaRPr lang="en-US"/>
           </a:p>
@@ -1162,7 +1123,7 @@
           <a:p>
             <a:fld id="{E36C4827-840E-4EC5-B0B2-4EAAD02724FF}" type="slidenum">
               <a:rPr lang="en-US" smtClean="0"/>
-              <a:t>7</a:t>
+              <a:t>6</a:t>
             </a:fld>
             <a:endParaRPr lang="en-US"/>
           </a:p>
@@ -1270,7 +1231,7 @@
           <a:p>
             <a:fld id="{E36C4827-840E-4EC5-B0B2-4EAAD02724FF}" type="slidenum">
               <a:rPr lang="en-US" smtClean="0"/>
-              <a:t>8</a:t>
+              <a:t>7</a:t>
             </a:fld>
             <a:endParaRPr lang="en-US"/>
           </a:p>
@@ -1378,7 +1339,7 @@
           <a:p>
             <a:fld id="{E36C4827-840E-4EC5-B0B2-4EAAD02724FF}" type="slidenum">
               <a:rPr lang="en-US" smtClean="0"/>
-              <a:t>9</a:t>
+              <a:t>8</a:t>
             </a:fld>
             <a:endParaRPr lang="en-US"/>
           </a:p>
@@ -1486,7 +1447,7 @@
           <a:p>
             <a:fld id="{E36C4827-840E-4EC5-B0B2-4EAAD02724FF}" type="slidenum">
               <a:rPr lang="en-US" smtClean="0"/>
-              <a:t>10</a:t>
+              <a:t>9</a:t>
             </a:fld>
             <a:endParaRPr lang="en-US"/>
           </a:p>
@@ -1636,7 +1597,7 @@
           <a:p>
             <a:fld id="{3D4C3592-CF2E-41CC-9324-DF0416BA06CC}" type="datetimeFigureOut">
               <a:rPr lang="en-GB" smtClean="0"/>
-              <a:t>03/03/2026</a:t>
+              <a:t>20/10/2026</a:t>
             </a:fld>
             <a:endParaRPr lang="en-GB"/>
           </a:p>
@@ -1806,7 +1767,7 @@
           <a:p>
             <a:fld id="{3D4C3592-CF2E-41CC-9324-DF0416BA06CC}" type="datetimeFigureOut">
               <a:rPr lang="en-GB" smtClean="0"/>
-              <a:t>03/03/2026</a:t>
+              <a:t>20/10/2026</a:t>
             </a:fld>
             <a:endParaRPr lang="en-GB"/>
           </a:p>
@@ -1986,7 +1947,7 @@
           <a:p>
             <a:fld id="{3D4C3592-CF2E-41CC-9324-DF0416BA06CC}" type="datetimeFigureOut">
               <a:rPr lang="en-GB" smtClean="0"/>
-              <a:t>03/03/2026</a:t>
+              <a:t>20/10/2026</a:t>
             </a:fld>
             <a:endParaRPr lang="en-GB"/>
           </a:p>
@@ -2156,7 +2117,7 @@
           <a:p>
             <a:fld id="{3D4C3592-CF2E-41CC-9324-DF0416BA06CC}" type="datetimeFigureOut">
               <a:rPr lang="en-GB" smtClean="0"/>
-              <a:t>03/03/2026</a:t>
+              <a:t>20/10/2026</a:t>
             </a:fld>
             <a:endParaRPr lang="en-GB"/>
           </a:p>
@@ -2402,7 +2363,7 @@
           <a:p>
             <a:fld id="{3D4C3592-CF2E-41CC-9324-DF0416BA06CC}" type="datetimeFigureOut">
               <a:rPr lang="en-GB" smtClean="0"/>
-              <a:t>03/03/2026</a:t>
+              <a:t>20/10/2026</a:t>
             </a:fld>
             <a:endParaRPr lang="en-GB"/>
           </a:p>
@@ -2634,7 +2595,7 @@
           <a:p>
             <a:fld id="{3D4C3592-CF2E-41CC-9324-DF0416BA06CC}" type="datetimeFigureOut">
               <a:rPr lang="en-GB" smtClean="0"/>
-              <a:t>03/03/2026</a:t>
+              <a:t>20/10/2026</a:t>
             </a:fld>
             <a:endParaRPr lang="en-GB"/>
           </a:p>
@@ -3001,7 +2962,7 @@
           <a:p>
             <a:fld id="{3D4C3592-CF2E-41CC-9324-DF0416BA06CC}" type="datetimeFigureOut">
               <a:rPr lang="en-GB" smtClean="0"/>
-              <a:t>03/03/2026</a:t>
+              <a:t>20/10/2026</a:t>
             </a:fld>
             <a:endParaRPr lang="en-GB"/>
           </a:p>
@@ -3119,7 +3080,7 @@
           <a:p>
             <a:fld id="{3D4C3592-CF2E-41CC-9324-DF0416BA06CC}" type="datetimeFigureOut">
               <a:rPr lang="en-GB" smtClean="0"/>
-              <a:t>03/03/2026</a:t>
+              <a:t>20/10/2026</a:t>
             </a:fld>
             <a:endParaRPr lang="en-GB"/>
           </a:p>
@@ -3214,7 +3175,7 @@
           <a:p>
             <a:fld id="{3D4C3592-CF2E-41CC-9324-DF0416BA06CC}" type="datetimeFigureOut">
               <a:rPr lang="en-GB" smtClean="0"/>
-              <a:t>03/03/2026</a:t>
+              <a:t>20/10/2026</a:t>
             </a:fld>
             <a:endParaRPr lang="en-GB"/>
           </a:p>
@@ -3491,7 +3452,7 @@
           <a:p>
             <a:fld id="{3D4C3592-CF2E-41CC-9324-DF0416BA06CC}" type="datetimeFigureOut">
               <a:rPr lang="en-GB" smtClean="0"/>
-              <a:t>03/03/2026</a:t>
+              <a:t>20/10/2026</a:t>
             </a:fld>
             <a:endParaRPr lang="en-GB"/>
           </a:p>
@@ -3744,7 +3705,7 @@
           <a:p>
             <a:fld id="{3D4C3592-CF2E-41CC-9324-DF0416BA06CC}" type="datetimeFigureOut">
               <a:rPr lang="en-GB" smtClean="0"/>
-              <a:t>03/03/2026</a:t>
+              <a:t>20/10/2026</a:t>
             </a:fld>
             <a:endParaRPr lang="en-GB"/>
           </a:p>
@@ -3957,7 +3918,7 @@
           <a:p>
             <a:fld id="{3D4C3592-CF2E-41CC-9324-DF0416BA06CC}" type="datetimeFigureOut">
               <a:rPr lang="en-GB" smtClean="0"/>
-              <a:t>03/03/2026</a:t>
+              <a:t>20/10/2026</a:t>
             </a:fld>
             <a:endParaRPr lang="en-GB"/>
           </a:p>
@@ -4520,205 +4481,7 @@
 </p:sld>
 </file>
 
-<file path=ppt/slides/slide10.xml><?xml version="1.0" encoding="utf-8"?>
-<p:sld xmlns:a="http://schemas.openxmlformats.org/drawingml/2006/main" xmlns:r="http://schemas.openxmlformats.org/officeDocument/2006/relationships" xmlns:p="http://schemas.openxmlformats.org/presentationml/2006/main">
-  <p:cSld>
-    <p:spTree>
-      <p:nvGrpSpPr>
-        <p:cNvPr id="1" name="">
-          <a:extLst>
-            <a:ext uri="{FF2B5EF4-FFF2-40B4-BE49-F238E27FC236}">
-              <a16:creationId xmlns:a16="http://schemas.microsoft.com/office/drawing/2014/main" id="{8B7E8F88-D306-4F2B-C8CB-E27736762717}"/>
-            </a:ext>
-          </a:extLst>
-        </p:cNvPr>
-        <p:cNvGrpSpPr/>
-        <p:nvPr/>
-      </p:nvGrpSpPr>
-      <p:grpSpPr>
-        <a:xfrm>
-          <a:off x="0" y="0"/>
-          <a:ext cx="0" cy="0"/>
-          <a:chOff x="0" y="0"/>
-          <a:chExt cx="0" cy="0"/>
-        </a:xfrm>
-      </p:grpSpPr>
-      <p:sp>
-        <p:nvSpPr>
-          <p:cNvPr id="5" name="TextBox 4">
-            <a:extLst>
-              <a:ext uri="{FF2B5EF4-FFF2-40B4-BE49-F238E27FC236}">
-                <a16:creationId xmlns:a16="http://schemas.microsoft.com/office/drawing/2014/main" id="{4C5FE424-8441-6DF9-1C46-7C89576FD26C}"/>
-              </a:ext>
-            </a:extLst>
-          </p:cNvPr>
-          <p:cNvSpPr txBox="1"/>
-          <p:nvPr/>
-        </p:nvSpPr>
-        <p:spPr>
-          <a:xfrm>
-            <a:off x="241301" y="129804"/>
-            <a:ext cx="11747500" cy="523220"/>
-          </a:xfrm>
-          <a:prstGeom prst="rect">
-            <a:avLst/>
-          </a:prstGeom>
-          <a:noFill/>
-        </p:spPr>
-        <p:txBody>
-          <a:bodyPr wrap="square" rtlCol="0">
-            <a:spAutoFit/>
-          </a:bodyPr>
-          <a:lstStyle/>
-          <a:p>
-            <a:r>
-              <a:rPr lang="en-US" sz="2800" dirty="0">
-                <a:ea typeface="Lato" panose="020B0604020202020204" pitchFamily="34" charset="0"/>
-                <a:cs typeface="Helvetica" panose="020B0604020202020204" pitchFamily="34" charset="0"/>
-              </a:rPr>
-              <a:t>Decision tree</a:t>
-            </a:r>
-            <a:endParaRPr lang="en-GB" sz="2800" dirty="0">
-              <a:ea typeface="Lato" panose="020B0604020202020204" pitchFamily="34" charset="0"/>
-              <a:cs typeface="Helvetica" panose="020B0604020202020204" pitchFamily="34" charset="0"/>
-            </a:endParaRPr>
-          </a:p>
-        </p:txBody>
-      </p:sp>
-      <p:pic>
-        <p:nvPicPr>
-          <p:cNvPr id="3" name="Picture 2">
-            <a:extLst>
-              <a:ext uri="{FF2B5EF4-FFF2-40B4-BE49-F238E27FC236}">
-                <a16:creationId xmlns:a16="http://schemas.microsoft.com/office/drawing/2014/main" id="{89EC30CF-2172-5839-87B8-04916A63D399}"/>
-              </a:ext>
-            </a:extLst>
-          </p:cNvPr>
-          <p:cNvPicPr>
-            <a:picLocks noChangeAspect="1"/>
-          </p:cNvPicPr>
-          <p:nvPr/>
-        </p:nvPicPr>
-        <p:blipFill>
-          <a:blip r:embed="rId3"/>
-          <a:stretch>
-            <a:fillRect/>
-          </a:stretch>
-        </p:blipFill>
-        <p:spPr>
-          <a:xfrm>
-            <a:off x="2472648" y="224207"/>
-            <a:ext cx="8811195" cy="3618653"/>
-          </a:xfrm>
-          <a:prstGeom prst="rect">
-            <a:avLst/>
-          </a:prstGeom>
-        </p:spPr>
-      </p:pic>
-      <p:pic>
-        <p:nvPicPr>
-          <p:cNvPr id="10" name="Picture 9">
-            <a:extLst>
-              <a:ext uri="{FF2B5EF4-FFF2-40B4-BE49-F238E27FC236}">
-                <a16:creationId xmlns:a16="http://schemas.microsoft.com/office/drawing/2014/main" id="{856C88E6-5292-6177-3439-6656F4C4D7FD}"/>
-              </a:ext>
-            </a:extLst>
-          </p:cNvPr>
-          <p:cNvPicPr>
-            <a:picLocks noChangeAspect="1"/>
-          </p:cNvPicPr>
-          <p:nvPr/>
-        </p:nvPicPr>
-        <p:blipFill>
-          <a:blip r:embed="rId4"/>
-          <a:stretch>
-            <a:fillRect/>
-          </a:stretch>
-        </p:blipFill>
-        <p:spPr>
-          <a:xfrm>
-            <a:off x="329569" y="4312992"/>
-            <a:ext cx="7767694" cy="1485911"/>
-          </a:xfrm>
-          <a:prstGeom prst="rect">
-            <a:avLst/>
-          </a:prstGeom>
-        </p:spPr>
-      </p:pic>
-    </p:spTree>
-    <p:extLst>
-      <p:ext uri="{BB962C8B-B14F-4D97-AF65-F5344CB8AC3E}">
-        <p14:creationId xmlns:p14="http://schemas.microsoft.com/office/powerpoint/2010/main" val="1864861740"/>
-      </p:ext>
-    </p:extLst>
-  </p:cSld>
-  <p:clrMapOvr>
-    <a:masterClrMapping/>
-  </p:clrMapOvr>
-</p:sld>
-</file>
-
 <file path=ppt/slides/slide2.xml><?xml version="1.0" encoding="utf-8"?>
-<p:sld xmlns:a="http://schemas.openxmlformats.org/drawingml/2006/main" xmlns:r="http://schemas.openxmlformats.org/officeDocument/2006/relationships" xmlns:p="http://schemas.openxmlformats.org/presentationml/2006/main">
-  <p:cSld>
-    <p:spTree>
-      <p:nvGrpSpPr>
-        <p:cNvPr id="1" name=""/>
-        <p:cNvGrpSpPr/>
-        <p:nvPr/>
-      </p:nvGrpSpPr>
-      <p:grpSpPr>
-        <a:xfrm>
-          <a:off x="0" y="0"/>
-          <a:ext cx="0" cy="0"/>
-          <a:chOff x="0" y="0"/>
-          <a:chExt cx="0" cy="0"/>
-        </a:xfrm>
-      </p:grpSpPr>
-      <p:pic>
-        <p:nvPicPr>
-          <p:cNvPr id="4" name="Picture 3">
-            <a:extLst>
-              <a:ext uri="{FF2B5EF4-FFF2-40B4-BE49-F238E27FC236}">
-                <a16:creationId xmlns:a16="http://schemas.microsoft.com/office/drawing/2014/main" id="{F55D3E5B-0C9E-D2FA-AF4C-0F665D0C1D74}"/>
-              </a:ext>
-            </a:extLst>
-          </p:cNvPr>
-          <p:cNvPicPr>
-            <a:picLocks noChangeAspect="1"/>
-          </p:cNvPicPr>
-          <p:nvPr/>
-        </p:nvPicPr>
-        <p:blipFill>
-          <a:blip r:embed="rId2"/>
-          <a:stretch>
-            <a:fillRect/>
-          </a:stretch>
-        </p:blipFill>
-        <p:spPr>
-          <a:xfrm>
-            <a:off x="3811138" y="0"/>
-            <a:ext cx="4569723" cy="6858000"/>
-          </a:xfrm>
-          <a:prstGeom prst="rect">
-            <a:avLst/>
-          </a:prstGeom>
-        </p:spPr>
-      </p:pic>
-    </p:spTree>
-    <p:extLst>
-      <p:ext uri="{BB962C8B-B14F-4D97-AF65-F5344CB8AC3E}">
-        <p14:creationId xmlns:p14="http://schemas.microsoft.com/office/powerpoint/2010/main" val="266687082"/>
-      </p:ext>
-    </p:extLst>
-  </p:cSld>
-  <p:clrMapOvr>
-    <a:masterClrMapping/>
-  </p:clrMapOvr>
-</p:sld>
-</file>
-
-<file path=ppt/slides/slide3.xml><?xml version="1.0" encoding="utf-8"?>
 <p:sld xmlns:a="http://schemas.openxmlformats.org/drawingml/2006/main" xmlns:r="http://schemas.openxmlformats.org/officeDocument/2006/relationships" xmlns:p="http://schemas.openxmlformats.org/presentationml/2006/main">
   <p:cSld>
     <p:spTree>
@@ -4954,7 +4717,7 @@
 </p:sld>
 </file>
 
-<file path=ppt/slides/slide4.xml><?xml version="1.0" encoding="utf-8"?>
+<file path=ppt/slides/slide3.xml><?xml version="1.0" encoding="utf-8"?>
 <p:sld xmlns:a="http://schemas.openxmlformats.org/drawingml/2006/main" xmlns:r="http://schemas.openxmlformats.org/officeDocument/2006/relationships" xmlns:p="http://schemas.openxmlformats.org/presentationml/2006/main">
   <p:cSld>
     <p:spTree>
@@ -5079,7 +4842,7 @@
 </p:sld>
 </file>
 
-<file path=ppt/slides/slide5.xml><?xml version="1.0" encoding="utf-8"?>
+<file path=ppt/slides/slide4.xml><?xml version="1.0" encoding="utf-8"?>
 <p:sld xmlns:a="http://schemas.openxmlformats.org/drawingml/2006/main" xmlns:r="http://schemas.openxmlformats.org/officeDocument/2006/relationships" xmlns:p="http://schemas.openxmlformats.org/presentationml/2006/main">
   <p:cSld>
     <p:spTree>
@@ -5253,7 +5016,7 @@
 </p:sld>
 </file>
 
-<file path=ppt/slides/slide6.xml><?xml version="1.0" encoding="utf-8"?>
+<file path=ppt/slides/slide5.xml><?xml version="1.0" encoding="utf-8"?>
 <p:sld xmlns:a="http://schemas.openxmlformats.org/drawingml/2006/main" xmlns:r="http://schemas.openxmlformats.org/officeDocument/2006/relationships" xmlns:p="http://schemas.openxmlformats.org/presentationml/2006/main">
   <p:cSld>
     <p:spTree>
@@ -5438,7 +5201,7 @@
 </p:sld>
 </file>
 
-<file path=ppt/slides/slide7.xml><?xml version="1.0" encoding="utf-8"?>
+<file path=ppt/slides/slide6.xml><?xml version="1.0" encoding="utf-8"?>
 <p:sld xmlns:a="http://schemas.openxmlformats.org/drawingml/2006/main" xmlns:r="http://schemas.openxmlformats.org/officeDocument/2006/relationships" xmlns:p="http://schemas.openxmlformats.org/presentationml/2006/main">
   <p:cSld>
     <p:spTree>
@@ -5694,7 +5457,7 @@
 </p:sld>
 </file>
 
-<file path=ppt/slides/slide8.xml><?xml version="1.0" encoding="utf-8"?>
+<file path=ppt/slides/slide7.xml><?xml version="1.0" encoding="utf-8"?>
 <p:sld xmlns:a="http://schemas.openxmlformats.org/drawingml/2006/main" xmlns:r="http://schemas.openxmlformats.org/officeDocument/2006/relationships" xmlns:p="http://schemas.openxmlformats.org/presentationml/2006/main">
   <p:cSld>
     <p:spTree>
@@ -5950,7 +5713,7 @@
 </p:sld>
 </file>
 
-<file path=ppt/slides/slide9.xml><?xml version="1.0" encoding="utf-8"?>
+<file path=ppt/slides/slide8.xml><?xml version="1.0" encoding="utf-8"?>
 <p:sld xmlns:a="http://schemas.openxmlformats.org/drawingml/2006/main" xmlns:r="http://schemas.openxmlformats.org/officeDocument/2006/relationships" xmlns:p="http://schemas.openxmlformats.org/presentationml/2006/main">
   <p:cSld>
     <p:spTree>
@@ -6197,6 +5960,144 @@
     <p:extLst>
       <p:ext uri="{BB962C8B-B14F-4D97-AF65-F5344CB8AC3E}">
         <p14:creationId xmlns:p14="http://schemas.microsoft.com/office/powerpoint/2010/main" val="788076603"/>
+      </p:ext>
+    </p:extLst>
+  </p:cSld>
+  <p:clrMapOvr>
+    <a:masterClrMapping/>
+  </p:clrMapOvr>
+</p:sld>
+</file>
+
+<file path=ppt/slides/slide9.xml><?xml version="1.0" encoding="utf-8"?>
+<p:sld xmlns:a="http://schemas.openxmlformats.org/drawingml/2006/main" xmlns:r="http://schemas.openxmlformats.org/officeDocument/2006/relationships" xmlns:p="http://schemas.openxmlformats.org/presentationml/2006/main">
+  <p:cSld>
+    <p:spTree>
+      <p:nvGrpSpPr>
+        <p:cNvPr id="1" name="">
+          <a:extLst>
+            <a:ext uri="{FF2B5EF4-FFF2-40B4-BE49-F238E27FC236}">
+              <a16:creationId xmlns:a16="http://schemas.microsoft.com/office/drawing/2014/main" id="{8B7E8F88-D306-4F2B-C8CB-E27736762717}"/>
+            </a:ext>
+          </a:extLst>
+        </p:cNvPr>
+        <p:cNvGrpSpPr/>
+        <p:nvPr/>
+      </p:nvGrpSpPr>
+      <p:grpSpPr>
+        <a:xfrm>
+          <a:off x="0" y="0"/>
+          <a:ext cx="0" cy="0"/>
+          <a:chOff x="0" y="0"/>
+          <a:chExt cx="0" cy="0"/>
+        </a:xfrm>
+      </p:grpSpPr>
+      <p:sp>
+        <p:nvSpPr>
+          <p:cNvPr id="5" name="TextBox 4">
+            <a:extLst>
+              <a:ext uri="{FF2B5EF4-FFF2-40B4-BE49-F238E27FC236}">
+                <a16:creationId xmlns:a16="http://schemas.microsoft.com/office/drawing/2014/main" id="{4C5FE424-8441-6DF9-1C46-7C89576FD26C}"/>
+              </a:ext>
+            </a:extLst>
+          </p:cNvPr>
+          <p:cNvSpPr txBox="1"/>
+          <p:nvPr/>
+        </p:nvSpPr>
+        <p:spPr>
+          <a:xfrm>
+            <a:off x="241301" y="129804"/>
+            <a:ext cx="11747500" cy="523220"/>
+          </a:xfrm>
+          <a:prstGeom prst="rect">
+            <a:avLst/>
+          </a:prstGeom>
+          <a:noFill/>
+        </p:spPr>
+        <p:txBody>
+          <a:bodyPr wrap="square" rtlCol="0">
+            <a:spAutoFit/>
+          </a:bodyPr>
+          <a:lstStyle/>
+          <a:p>
+            <a:r>
+              <a:rPr lang="en-US" sz="2800" dirty="0">
+                <a:ea typeface="Lato" panose="020B0604020202020204" pitchFamily="34" charset="0"/>
+                <a:cs typeface="Helvetica" panose="020B0604020202020204" pitchFamily="34" charset="0"/>
+              </a:rPr>
+              <a:t>Decision tree</a:t>
+            </a:r>
+            <a:endParaRPr lang="en-GB" sz="2800" dirty="0">
+              <a:ea typeface="Lato" panose="020B0604020202020204" pitchFamily="34" charset="0"/>
+              <a:cs typeface="Helvetica" panose="020B0604020202020204" pitchFamily="34" charset="0"/>
+            </a:endParaRPr>
+          </a:p>
+        </p:txBody>
+      </p:sp>
+      <p:pic>
+        <p:nvPicPr>
+          <p:cNvPr id="3" name="Picture 2">
+            <a:extLst>
+              <a:ext uri="{FF2B5EF4-FFF2-40B4-BE49-F238E27FC236}">
+                <a16:creationId xmlns:a16="http://schemas.microsoft.com/office/drawing/2014/main" id="{89EC30CF-2172-5839-87B8-04916A63D399}"/>
+              </a:ext>
+            </a:extLst>
+          </p:cNvPr>
+          <p:cNvPicPr>
+            <a:picLocks noChangeAspect="1"/>
+          </p:cNvPicPr>
+          <p:nvPr/>
+        </p:nvPicPr>
+        <p:blipFill>
+          <a:blip r:embed="rId3"/>
+          <a:stretch>
+            <a:fillRect/>
+          </a:stretch>
+        </p:blipFill>
+        <p:spPr>
+          <a:xfrm>
+            <a:off x="2472648" y="224207"/>
+            <a:ext cx="8811195" cy="3618653"/>
+          </a:xfrm>
+          <a:prstGeom prst="rect">
+            <a:avLst/>
+          </a:prstGeom>
+        </p:spPr>
+      </p:pic>
+      <p:pic>
+        <p:nvPicPr>
+          <p:cNvPr id="10" name="Picture 9">
+            <a:extLst>
+              <a:ext uri="{FF2B5EF4-FFF2-40B4-BE49-F238E27FC236}">
+                <a16:creationId xmlns:a16="http://schemas.microsoft.com/office/drawing/2014/main" id="{856C88E6-5292-6177-3439-6656F4C4D7FD}"/>
+              </a:ext>
+            </a:extLst>
+          </p:cNvPr>
+          <p:cNvPicPr>
+            <a:picLocks noChangeAspect="1"/>
+          </p:cNvPicPr>
+          <p:nvPr/>
+        </p:nvPicPr>
+        <p:blipFill>
+          <a:blip r:embed="rId4"/>
+          <a:stretch>
+            <a:fillRect/>
+          </a:stretch>
+        </p:blipFill>
+        <p:spPr>
+          <a:xfrm>
+            <a:off x="329569" y="4312992"/>
+            <a:ext cx="7767694" cy="1485911"/>
+          </a:xfrm>
+          <a:prstGeom prst="rect">
+            <a:avLst/>
+          </a:prstGeom>
+        </p:spPr>
+      </p:pic>
+    </p:spTree>
+    <p:extLst>
+      <p:ext uri="{BB962C8B-B14F-4D97-AF65-F5344CB8AC3E}">
+        <p14:creationId xmlns:p14="http://schemas.microsoft.com/office/powerpoint/2010/main" val="1864861740"/>
       </p:ext>
     </p:extLst>
   </p:cSld>

--- a/03_Evaluation/slides/3_2_DecisionTrees.pptx
+++ b/03_Evaluation/slides/3_2_DecisionTrees.pptx
@@ -5,18 +5,17 @@
     <p:sldMasterId id="2147483648" r:id="rId1"/>
   </p:sldMasterIdLst>
   <p:notesMasterIdLst>
-    <p:notesMasterId r:id="rId11"/>
+    <p:notesMasterId r:id="rId10"/>
   </p:notesMasterIdLst>
   <p:sldIdLst>
-    <p:sldId id="574" r:id="rId2"/>
-    <p:sldId id="573" r:id="rId3"/>
-    <p:sldId id="575" r:id="rId4"/>
-    <p:sldId id="581" r:id="rId5"/>
-    <p:sldId id="582" r:id="rId6"/>
-    <p:sldId id="583" r:id="rId7"/>
-    <p:sldId id="584" r:id="rId8"/>
-    <p:sldId id="585" r:id="rId9"/>
-    <p:sldId id="580" r:id="rId10"/>
+    <p:sldId id="573" r:id="rId2"/>
+    <p:sldId id="575" r:id="rId3"/>
+    <p:sldId id="581" r:id="rId4"/>
+    <p:sldId id="582" r:id="rId5"/>
+    <p:sldId id="583" r:id="rId6"/>
+    <p:sldId id="584" r:id="rId7"/>
+    <p:sldId id="585" r:id="rId8"/>
+    <p:sldId id="580" r:id="rId9"/>
   </p:sldIdLst>
   <p:sldSz cx="12192000" cy="6858000"/>
   <p:notesSz cx="6858000" cy="9144000"/>
@@ -123,21 +122,165 @@
 </p:presentation>
 </file>
 
+<file path=ppt/revisionInfo.xml><?xml version="1.0" encoding="utf-8"?>
+<p1510:revInfo xmlns:a="http://schemas.openxmlformats.org/drawingml/2006/main" xmlns:r="http://schemas.openxmlformats.org/officeDocument/2006/relationships" xmlns:p1510="http://schemas.microsoft.com/office/powerpoint/2015/10/main">
+  <p1510:revLst>
+    <p1510:client id="{FD78DA15-C94C-4E6E-89F8-0FEFB07160D8}" v="7" dt="2026-10-22T07:24:30.835"/>
+  </p1510:revLst>
+</p1510:revInfo>
+</file>
+
 <file path=ppt/changesInfos/changesInfo1.xml><?xml version="1.0" encoding="utf-8"?>
 <pc:chgInfo xmlns:a="http://schemas.openxmlformats.org/drawingml/2006/main" xmlns:r="http://schemas.openxmlformats.org/officeDocument/2006/relationships" xmlns:ac="http://schemas.microsoft.com/office/drawing/2013/main/command" xmlns:pc="http://schemas.microsoft.com/office/powerpoint/2013/main/command">
   <pc:docChgLst>
     <pc:chgData name="Robbin Bouwmeester" userId="1dbfebabfc25a55a" providerId="LiveId" clId="{75D63595-F797-482E-A4A0-2F4889B74D4F}"/>
     <pc:docChg chg="undo custSel addSld delSld modSld">
-      <pc:chgData name="Robbin Bouwmeester" userId="1dbfebabfc25a55a" providerId="LiveId" clId="{75D63595-F797-482E-A4A0-2F4889B74D4F}" dt="2026-10-20T12:31:49.011" v="7" actId="47"/>
+      <pc:chgData name="Robbin Bouwmeester" userId="1dbfebabfc25a55a" providerId="LiveId" clId="{75D63595-F797-482E-A4A0-2F4889B74D4F}" dt="2026-10-22T07:24:38.173" v="97" actId="1036"/>
       <pc:docMkLst>
         <pc:docMk/>
       </pc:docMkLst>
-      <pc:sldChg chg="addSp new del mod">
-        <pc:chgData name="Robbin Bouwmeester" userId="1dbfebabfc25a55a" providerId="LiveId" clId="{75D63595-F797-482E-A4A0-2F4889B74D4F}" dt="2026-10-20T12:31:49.011" v="7" actId="47"/>
+      <pc:sldChg chg="modSp mod">
+        <pc:chgData name="Robbin Bouwmeester" userId="1dbfebabfc25a55a" providerId="LiveId" clId="{75D63595-F797-482E-A4A0-2F4889B74D4F}" dt="2026-10-22T07:23:23.789" v="14" actId="403"/>
         <pc:sldMkLst>
           <pc:docMk/>
-          <pc:sldMk cId="266687082" sldId="586"/>
+          <pc:sldMk cId="288637061" sldId="573"/>
         </pc:sldMkLst>
+        <pc:spChg chg="mod">
+          <ac:chgData name="Robbin Bouwmeester" userId="1dbfebabfc25a55a" providerId="LiveId" clId="{75D63595-F797-482E-A4A0-2F4889B74D4F}" dt="2026-10-22T07:23:23.789" v="14" actId="403"/>
+          <ac:spMkLst>
+            <pc:docMk/>
+            <pc:sldMk cId="288637061" sldId="573"/>
+            <ac:spMk id="5" creationId="{C0B98FDB-3BF2-4433-BC8F-0F0352AF9AB6}"/>
+          </ac:spMkLst>
+        </pc:spChg>
+      </pc:sldChg>
+      <pc:sldChg chg="del">
+        <pc:chgData name="Robbin Bouwmeester" userId="1dbfebabfc25a55a" providerId="LiveId" clId="{75D63595-F797-482E-A4A0-2F4889B74D4F}" dt="2026-10-22T07:22:08.785" v="8" actId="47"/>
+        <pc:sldMkLst>
+          <pc:docMk/>
+          <pc:sldMk cId="2828702633" sldId="574"/>
+        </pc:sldMkLst>
+      </pc:sldChg>
+      <pc:sldChg chg="modSp mod">
+        <pc:chgData name="Robbin Bouwmeester" userId="1dbfebabfc25a55a" providerId="LiveId" clId="{75D63595-F797-482E-A4A0-2F4889B74D4F}" dt="2026-10-22T07:23:20.687" v="13" actId="113"/>
+        <pc:sldMkLst>
+          <pc:docMk/>
+          <pc:sldMk cId="3632248924" sldId="575"/>
+        </pc:sldMkLst>
+        <pc:spChg chg="mod">
+          <ac:chgData name="Robbin Bouwmeester" userId="1dbfebabfc25a55a" providerId="LiveId" clId="{75D63595-F797-482E-A4A0-2F4889B74D4F}" dt="2026-10-22T07:23:20.687" v="13" actId="113"/>
+          <ac:spMkLst>
+            <pc:docMk/>
+            <pc:sldMk cId="3632248924" sldId="575"/>
+            <ac:spMk id="5" creationId="{C9BC2C0C-6B3C-4578-2502-99B14CC22C13}"/>
+          </ac:spMkLst>
+        </pc:spChg>
+      </pc:sldChg>
+      <pc:sldChg chg="modSp mod">
+        <pc:chgData name="Robbin Bouwmeester" userId="1dbfebabfc25a55a" providerId="LiveId" clId="{75D63595-F797-482E-A4A0-2F4889B74D4F}" dt="2026-10-22T07:24:38.173" v="97" actId="1036"/>
+        <pc:sldMkLst>
+          <pc:docMk/>
+          <pc:sldMk cId="1864861740" sldId="580"/>
+        </pc:sldMkLst>
+        <pc:spChg chg="mod">
+          <ac:chgData name="Robbin Bouwmeester" userId="1dbfebabfc25a55a" providerId="LiveId" clId="{75D63595-F797-482E-A4A0-2F4889B74D4F}" dt="2026-10-22T07:24:30.835" v="75"/>
+          <ac:spMkLst>
+            <pc:docMk/>
+            <pc:sldMk cId="1864861740" sldId="580"/>
+            <ac:spMk id="5" creationId="{4C5FE424-8441-6DF9-1C46-7C89576FD26C}"/>
+          </ac:spMkLst>
+        </pc:spChg>
+        <pc:picChg chg="mod">
+          <ac:chgData name="Robbin Bouwmeester" userId="1dbfebabfc25a55a" providerId="LiveId" clId="{75D63595-F797-482E-A4A0-2F4889B74D4F}" dt="2026-10-22T07:24:38.173" v="97" actId="1036"/>
+          <ac:picMkLst>
+            <pc:docMk/>
+            <pc:sldMk cId="1864861740" sldId="580"/>
+            <ac:picMk id="3" creationId="{89EC30CF-2172-5839-87B8-04916A63D399}"/>
+          </ac:picMkLst>
+        </pc:picChg>
+        <pc:picChg chg="mod">
+          <ac:chgData name="Robbin Bouwmeester" userId="1dbfebabfc25a55a" providerId="LiveId" clId="{75D63595-F797-482E-A4A0-2F4889B74D4F}" dt="2026-10-22T07:24:38.173" v="97" actId="1036"/>
+          <ac:picMkLst>
+            <pc:docMk/>
+            <pc:sldMk cId="1864861740" sldId="580"/>
+            <ac:picMk id="10" creationId="{856C88E6-5292-6177-3439-6656F4C4D7FD}"/>
+          </ac:picMkLst>
+        </pc:picChg>
+      </pc:sldChg>
+      <pc:sldChg chg="modSp mod">
+        <pc:chgData name="Robbin Bouwmeester" userId="1dbfebabfc25a55a" providerId="LiveId" clId="{75D63595-F797-482E-A4A0-2F4889B74D4F}" dt="2026-10-22T07:24:06.324" v="69"/>
+        <pc:sldMkLst>
+          <pc:docMk/>
+          <pc:sldMk cId="799740789" sldId="581"/>
+        </pc:sldMkLst>
+        <pc:spChg chg="mod">
+          <ac:chgData name="Robbin Bouwmeester" userId="1dbfebabfc25a55a" providerId="LiveId" clId="{75D63595-F797-482E-A4A0-2F4889B74D4F}" dt="2026-10-22T07:24:06.324" v="69"/>
+          <ac:spMkLst>
+            <pc:docMk/>
+            <pc:sldMk cId="799740789" sldId="581"/>
+            <ac:spMk id="5" creationId="{AB4553A2-B14A-4982-6BB6-82E54A04671C}"/>
+          </ac:spMkLst>
+        </pc:spChg>
+      </pc:sldChg>
+      <pc:sldChg chg="modSp">
+        <pc:chgData name="Robbin Bouwmeester" userId="1dbfebabfc25a55a" providerId="LiveId" clId="{75D63595-F797-482E-A4A0-2F4889B74D4F}" dt="2026-10-22T07:24:10.145" v="70"/>
+        <pc:sldMkLst>
+          <pc:docMk/>
+          <pc:sldMk cId="3210233091" sldId="582"/>
+        </pc:sldMkLst>
+        <pc:spChg chg="mod">
+          <ac:chgData name="Robbin Bouwmeester" userId="1dbfebabfc25a55a" providerId="LiveId" clId="{75D63595-F797-482E-A4A0-2F4889B74D4F}" dt="2026-10-22T07:24:10.145" v="70"/>
+          <ac:spMkLst>
+            <pc:docMk/>
+            <pc:sldMk cId="3210233091" sldId="582"/>
+            <ac:spMk id="5" creationId="{8DC509BB-DDEE-01D4-4A25-5D724FDAEC6B}"/>
+          </ac:spMkLst>
+        </pc:spChg>
+      </pc:sldChg>
+      <pc:sldChg chg="modSp">
+        <pc:chgData name="Robbin Bouwmeester" userId="1dbfebabfc25a55a" providerId="LiveId" clId="{75D63595-F797-482E-A4A0-2F4889B74D4F}" dt="2026-10-22T07:24:18.822" v="72"/>
+        <pc:sldMkLst>
+          <pc:docMk/>
+          <pc:sldMk cId="2059063285" sldId="583"/>
+        </pc:sldMkLst>
+        <pc:spChg chg="mod">
+          <ac:chgData name="Robbin Bouwmeester" userId="1dbfebabfc25a55a" providerId="LiveId" clId="{75D63595-F797-482E-A4A0-2F4889B74D4F}" dt="2026-10-22T07:24:18.822" v="72"/>
+          <ac:spMkLst>
+            <pc:docMk/>
+            <pc:sldMk cId="2059063285" sldId="583"/>
+            <ac:spMk id="5" creationId="{E0A96BCE-4E61-EEAC-68E2-B8D4ED288240}"/>
+          </ac:spMkLst>
+        </pc:spChg>
+      </pc:sldChg>
+      <pc:sldChg chg="modSp">
+        <pc:chgData name="Robbin Bouwmeester" userId="1dbfebabfc25a55a" providerId="LiveId" clId="{75D63595-F797-482E-A4A0-2F4889B74D4F}" dt="2026-10-22T07:24:21.700" v="73"/>
+        <pc:sldMkLst>
+          <pc:docMk/>
+          <pc:sldMk cId="2336268713" sldId="584"/>
+        </pc:sldMkLst>
+        <pc:spChg chg="mod">
+          <ac:chgData name="Robbin Bouwmeester" userId="1dbfebabfc25a55a" providerId="LiveId" clId="{75D63595-F797-482E-A4A0-2F4889B74D4F}" dt="2026-10-22T07:24:21.700" v="73"/>
+          <ac:spMkLst>
+            <pc:docMk/>
+            <pc:sldMk cId="2336268713" sldId="584"/>
+            <ac:spMk id="5" creationId="{1E6C4FBA-BF4F-A8D6-18F7-342C8DD4F927}"/>
+          </ac:spMkLst>
+        </pc:spChg>
+      </pc:sldChg>
+      <pc:sldChg chg="modSp">
+        <pc:chgData name="Robbin Bouwmeester" userId="1dbfebabfc25a55a" providerId="LiveId" clId="{75D63595-F797-482E-A4A0-2F4889B74D4F}" dt="2026-10-22T07:24:24.584" v="74"/>
+        <pc:sldMkLst>
+          <pc:docMk/>
+          <pc:sldMk cId="788076603" sldId="585"/>
+        </pc:sldMkLst>
+        <pc:spChg chg="mod">
+          <ac:chgData name="Robbin Bouwmeester" userId="1dbfebabfc25a55a" providerId="LiveId" clId="{75D63595-F797-482E-A4A0-2F4889B74D4F}" dt="2026-10-22T07:24:24.584" v="74"/>
+          <ac:spMkLst>
+            <pc:docMk/>
+            <pc:sldMk cId="788076603" sldId="585"/>
+            <ac:spMk id="5" creationId="{4B0092A4-2042-BD97-1DA9-DEFC06A18BD0}"/>
+          </ac:spMkLst>
+        </pc:spChg>
       </pc:sldChg>
     </pc:docChg>
   </pc:docChgLst>
@@ -502,114 +645,6 @@
         <p:cNvPr id="1" name="">
           <a:extLst>
             <a:ext uri="{FF2B5EF4-FFF2-40B4-BE49-F238E27FC236}">
-              <a16:creationId xmlns:a16="http://schemas.microsoft.com/office/drawing/2014/main" id="{60EBE2C5-39A6-2E5E-4D47-7E8AB986C293}"/>
-            </a:ext>
-          </a:extLst>
-        </p:cNvPr>
-        <p:cNvGrpSpPr/>
-        <p:nvPr/>
-      </p:nvGrpSpPr>
-      <p:grpSpPr>
-        <a:xfrm>
-          <a:off x="0" y="0"/>
-          <a:ext cx="0" cy="0"/>
-          <a:chOff x="0" y="0"/>
-          <a:chExt cx="0" cy="0"/>
-        </a:xfrm>
-      </p:grpSpPr>
-      <p:sp>
-        <p:nvSpPr>
-          <p:cNvPr id="2" name="Slide Image Placeholder 1">
-            <a:extLst>
-              <a:ext uri="{FF2B5EF4-FFF2-40B4-BE49-F238E27FC236}">
-                <a16:creationId xmlns:a16="http://schemas.microsoft.com/office/drawing/2014/main" id="{C6E8A3D8-2AA5-BEEE-F9EC-CB9BFFE5238D}"/>
-              </a:ext>
-            </a:extLst>
-          </p:cNvPr>
-          <p:cNvSpPr>
-            <a:spLocks noGrp="1" noRot="1" noChangeAspect="1"/>
-          </p:cNvSpPr>
-          <p:nvPr>
-            <p:ph type="sldImg"/>
-          </p:nvPr>
-        </p:nvSpPr>
-        <p:spPr/>
-      </p:sp>
-      <p:sp>
-        <p:nvSpPr>
-          <p:cNvPr id="3" name="Notes Placeholder 2">
-            <a:extLst>
-              <a:ext uri="{FF2B5EF4-FFF2-40B4-BE49-F238E27FC236}">
-                <a16:creationId xmlns:a16="http://schemas.microsoft.com/office/drawing/2014/main" id="{43057C48-46A1-30CC-251D-1699201B5EBF}"/>
-              </a:ext>
-            </a:extLst>
-          </p:cNvPr>
-          <p:cNvSpPr>
-            <a:spLocks noGrp="1"/>
-          </p:cNvSpPr>
-          <p:nvPr>
-            <p:ph type="body" idx="1"/>
-          </p:nvPr>
-        </p:nvSpPr>
-        <p:spPr/>
-        <p:txBody>
-          <a:bodyPr/>
-          <a:lstStyle/>
-          <a:p>
-            <a:endParaRPr lang="nl-BE" dirty="0"/>
-          </a:p>
-        </p:txBody>
-      </p:sp>
-      <p:sp>
-        <p:nvSpPr>
-          <p:cNvPr id="4" name="Slide Number Placeholder 3">
-            <a:extLst>
-              <a:ext uri="{FF2B5EF4-FFF2-40B4-BE49-F238E27FC236}">
-                <a16:creationId xmlns:a16="http://schemas.microsoft.com/office/drawing/2014/main" id="{229B898E-C3E2-5FB4-93B1-99091EED925D}"/>
-              </a:ext>
-            </a:extLst>
-          </p:cNvPr>
-          <p:cNvSpPr>
-            <a:spLocks noGrp="1"/>
-          </p:cNvSpPr>
-          <p:nvPr>
-            <p:ph type="sldNum" sz="quarter" idx="10"/>
-          </p:nvPr>
-        </p:nvSpPr>
-        <p:spPr/>
-        <p:txBody>
-          <a:bodyPr/>
-          <a:lstStyle/>
-          <a:p>
-            <a:fld id="{E36C4827-840E-4EC5-B0B2-4EAAD02724FF}" type="slidenum">
-              <a:rPr lang="en-US" smtClean="0"/>
-              <a:t>1</a:t>
-            </a:fld>
-            <a:endParaRPr lang="en-US"/>
-          </a:p>
-        </p:txBody>
-      </p:sp>
-    </p:spTree>
-    <p:extLst>
-      <p:ext uri="{BB962C8B-B14F-4D97-AF65-F5344CB8AC3E}">
-        <p14:creationId xmlns:p14="http://schemas.microsoft.com/office/powerpoint/2010/main" val="1890525974"/>
-      </p:ext>
-    </p:extLst>
-  </p:cSld>
-  <p:clrMapOvr>
-    <a:masterClrMapping/>
-  </p:clrMapOvr>
-</p:notes>
-</file>
-
-<file path=ppt/notesSlides/notesSlide2.xml><?xml version="1.0" encoding="utf-8"?>
-<p:notes xmlns:a="http://schemas.openxmlformats.org/drawingml/2006/main" xmlns:r="http://schemas.openxmlformats.org/officeDocument/2006/relationships" xmlns:p="http://schemas.openxmlformats.org/presentationml/2006/main">
-  <p:cSld>
-    <p:spTree>
-      <p:nvGrpSpPr>
-        <p:cNvPr id="1" name="">
-          <a:extLst>
-            <a:ext uri="{FF2B5EF4-FFF2-40B4-BE49-F238E27FC236}">
               <a16:creationId xmlns:a16="http://schemas.microsoft.com/office/drawing/2014/main" id="{167D86F3-DFF2-D05A-1ACA-60D410C3212B}"/>
             </a:ext>
           </a:extLst>
@@ -691,7 +726,7 @@
           <a:p>
             <a:fld id="{E36C4827-840E-4EC5-B0B2-4EAAD02724FF}" type="slidenum">
               <a:rPr lang="en-US" smtClean="0"/>
-              <a:t>2</a:t>
+              <a:t>1</a:t>
             </a:fld>
             <a:endParaRPr lang="en-US"/>
           </a:p>
@@ -710,7 +745,7 @@
 </p:notes>
 </file>
 
-<file path=ppt/notesSlides/notesSlide3.xml><?xml version="1.0" encoding="utf-8"?>
+<file path=ppt/notesSlides/notesSlide2.xml><?xml version="1.0" encoding="utf-8"?>
 <p:notes xmlns:a="http://schemas.openxmlformats.org/drawingml/2006/main" xmlns:r="http://schemas.openxmlformats.org/officeDocument/2006/relationships" xmlns:p="http://schemas.openxmlformats.org/presentationml/2006/main">
   <p:cSld>
     <p:spTree>
@@ -799,7 +834,7 @@
           <a:p>
             <a:fld id="{E36C4827-840E-4EC5-B0B2-4EAAD02724FF}" type="slidenum">
               <a:rPr lang="en-US" smtClean="0"/>
-              <a:t>3</a:t>
+              <a:t>2</a:t>
             </a:fld>
             <a:endParaRPr lang="en-US"/>
           </a:p>
@@ -818,7 +853,7 @@
 </p:notes>
 </file>
 
-<file path=ppt/notesSlides/notesSlide4.xml><?xml version="1.0" encoding="utf-8"?>
+<file path=ppt/notesSlides/notesSlide3.xml><?xml version="1.0" encoding="utf-8"?>
 <p:notes xmlns:a="http://schemas.openxmlformats.org/drawingml/2006/main" xmlns:r="http://schemas.openxmlformats.org/officeDocument/2006/relationships" xmlns:p="http://schemas.openxmlformats.org/presentationml/2006/main">
   <p:cSld>
     <p:spTree>
@@ -907,7 +942,7 @@
           <a:p>
             <a:fld id="{E36C4827-840E-4EC5-B0B2-4EAAD02724FF}" type="slidenum">
               <a:rPr lang="en-US" smtClean="0"/>
-              <a:t>4</a:t>
+              <a:t>3</a:t>
             </a:fld>
             <a:endParaRPr lang="en-US"/>
           </a:p>
@@ -926,7 +961,7 @@
 </p:notes>
 </file>
 
-<file path=ppt/notesSlides/notesSlide5.xml><?xml version="1.0" encoding="utf-8"?>
+<file path=ppt/notesSlides/notesSlide4.xml><?xml version="1.0" encoding="utf-8"?>
 <p:notes xmlns:a="http://schemas.openxmlformats.org/drawingml/2006/main" xmlns:r="http://schemas.openxmlformats.org/officeDocument/2006/relationships" xmlns:p="http://schemas.openxmlformats.org/presentationml/2006/main">
   <p:cSld>
     <p:spTree>
@@ -1015,7 +1050,7 @@
           <a:p>
             <a:fld id="{E36C4827-840E-4EC5-B0B2-4EAAD02724FF}" type="slidenum">
               <a:rPr lang="en-US" smtClean="0"/>
-              <a:t>5</a:t>
+              <a:t>4</a:t>
             </a:fld>
             <a:endParaRPr lang="en-US"/>
           </a:p>
@@ -1034,7 +1069,7 @@
 </p:notes>
 </file>
 
-<file path=ppt/notesSlides/notesSlide6.xml><?xml version="1.0" encoding="utf-8"?>
+<file path=ppt/notesSlides/notesSlide5.xml><?xml version="1.0" encoding="utf-8"?>
 <p:notes xmlns:a="http://schemas.openxmlformats.org/drawingml/2006/main" xmlns:r="http://schemas.openxmlformats.org/officeDocument/2006/relationships" xmlns:p="http://schemas.openxmlformats.org/presentationml/2006/main">
   <p:cSld>
     <p:spTree>
@@ -1123,7 +1158,7 @@
           <a:p>
             <a:fld id="{E36C4827-840E-4EC5-B0B2-4EAAD02724FF}" type="slidenum">
               <a:rPr lang="en-US" smtClean="0"/>
-              <a:t>6</a:t>
+              <a:t>5</a:t>
             </a:fld>
             <a:endParaRPr lang="en-US"/>
           </a:p>
@@ -1142,7 +1177,7 @@
 </p:notes>
 </file>
 
-<file path=ppt/notesSlides/notesSlide7.xml><?xml version="1.0" encoding="utf-8"?>
+<file path=ppt/notesSlides/notesSlide6.xml><?xml version="1.0" encoding="utf-8"?>
 <p:notes xmlns:a="http://schemas.openxmlformats.org/drawingml/2006/main" xmlns:r="http://schemas.openxmlformats.org/officeDocument/2006/relationships" xmlns:p="http://schemas.openxmlformats.org/presentationml/2006/main">
   <p:cSld>
     <p:spTree>
@@ -1231,7 +1266,7 @@
           <a:p>
             <a:fld id="{E36C4827-840E-4EC5-B0B2-4EAAD02724FF}" type="slidenum">
               <a:rPr lang="en-US" smtClean="0"/>
-              <a:t>7</a:t>
+              <a:t>6</a:t>
             </a:fld>
             <a:endParaRPr lang="en-US"/>
           </a:p>
@@ -1250,7 +1285,7 @@
 </p:notes>
 </file>
 
-<file path=ppt/notesSlides/notesSlide8.xml><?xml version="1.0" encoding="utf-8"?>
+<file path=ppt/notesSlides/notesSlide7.xml><?xml version="1.0" encoding="utf-8"?>
 <p:notes xmlns:a="http://schemas.openxmlformats.org/drawingml/2006/main" xmlns:r="http://schemas.openxmlformats.org/officeDocument/2006/relationships" xmlns:p="http://schemas.openxmlformats.org/presentationml/2006/main">
   <p:cSld>
     <p:spTree>
@@ -1339,7 +1374,7 @@
           <a:p>
             <a:fld id="{E36C4827-840E-4EC5-B0B2-4EAAD02724FF}" type="slidenum">
               <a:rPr lang="en-US" smtClean="0"/>
-              <a:t>8</a:t>
+              <a:t>7</a:t>
             </a:fld>
             <a:endParaRPr lang="en-US"/>
           </a:p>
@@ -1358,7 +1393,7 @@
 </p:notes>
 </file>
 
-<file path=ppt/notesSlides/notesSlide9.xml><?xml version="1.0" encoding="utf-8"?>
+<file path=ppt/notesSlides/notesSlide8.xml><?xml version="1.0" encoding="utf-8"?>
 <p:notes xmlns:a="http://schemas.openxmlformats.org/drawingml/2006/main" xmlns:r="http://schemas.openxmlformats.org/officeDocument/2006/relationships" xmlns:p="http://schemas.openxmlformats.org/presentationml/2006/main">
   <p:cSld>
     <p:spTree>
@@ -1447,7 +1482,7 @@
           <a:p>
             <a:fld id="{E36C4827-840E-4EC5-B0B2-4EAAD02724FF}" type="slidenum">
               <a:rPr lang="en-US" smtClean="0"/>
-              <a:t>9</a:t>
+              <a:t>8</a:t>
             </a:fld>
             <a:endParaRPr lang="en-US"/>
           </a:p>
@@ -4314,181 +4349,6 @@
         <p:cNvPr id="1" name="">
           <a:extLst>
             <a:ext uri="{FF2B5EF4-FFF2-40B4-BE49-F238E27FC236}">
-              <a16:creationId xmlns:a16="http://schemas.microsoft.com/office/drawing/2014/main" id="{501F5A43-7323-2720-6C03-23A69A29D3CE}"/>
-            </a:ext>
-          </a:extLst>
-        </p:cNvPr>
-        <p:cNvGrpSpPr/>
-        <p:nvPr/>
-      </p:nvGrpSpPr>
-      <p:grpSpPr>
-        <a:xfrm>
-          <a:off x="0" y="0"/>
-          <a:ext cx="0" cy="0"/>
-          <a:chOff x="0" y="0"/>
-          <a:chExt cx="0" cy="0"/>
-        </a:xfrm>
-      </p:grpSpPr>
-      <p:sp>
-        <p:nvSpPr>
-          <p:cNvPr id="5" name="TextBox 4">
-            <a:extLst>
-              <a:ext uri="{FF2B5EF4-FFF2-40B4-BE49-F238E27FC236}">
-                <a16:creationId xmlns:a16="http://schemas.microsoft.com/office/drawing/2014/main" id="{11037E0A-D91E-C428-9B32-A61C72C6ABF5}"/>
-              </a:ext>
-            </a:extLst>
-          </p:cNvPr>
-          <p:cNvSpPr txBox="1"/>
-          <p:nvPr/>
-        </p:nvSpPr>
-        <p:spPr>
-          <a:xfrm>
-            <a:off x="241301" y="129804"/>
-            <a:ext cx="11747500" cy="523220"/>
-          </a:xfrm>
-          <a:prstGeom prst="rect">
-            <a:avLst/>
-          </a:prstGeom>
-          <a:noFill/>
-        </p:spPr>
-        <p:txBody>
-          <a:bodyPr wrap="square" rtlCol="0">
-            <a:spAutoFit/>
-          </a:bodyPr>
-          <a:lstStyle/>
-          <a:p>
-            <a:r>
-              <a:rPr lang="en-US" sz="2800" dirty="0">
-                <a:ea typeface="Lato" panose="020B0604020202020204" pitchFamily="34" charset="0"/>
-                <a:cs typeface="Helvetica" panose="020B0604020202020204" pitchFamily="34" charset="0"/>
-              </a:rPr>
-              <a:t>Decision tree</a:t>
-            </a:r>
-            <a:endParaRPr lang="en-GB" sz="2800" dirty="0">
-              <a:ea typeface="Lato" panose="020B0604020202020204" pitchFamily="34" charset="0"/>
-              <a:cs typeface="Helvetica" panose="020B0604020202020204" pitchFamily="34" charset="0"/>
-            </a:endParaRPr>
-          </a:p>
-        </p:txBody>
-      </p:sp>
-      <p:sp>
-        <p:nvSpPr>
-          <p:cNvPr id="3" name="TextBox 2">
-            <a:extLst>
-              <a:ext uri="{FF2B5EF4-FFF2-40B4-BE49-F238E27FC236}">
-                <a16:creationId xmlns:a16="http://schemas.microsoft.com/office/drawing/2014/main" id="{C8A23BF7-D252-A369-C97D-16B265E100C9}"/>
-              </a:ext>
-            </a:extLst>
-          </p:cNvPr>
-          <p:cNvSpPr txBox="1"/>
-          <p:nvPr/>
-        </p:nvSpPr>
-        <p:spPr>
-          <a:xfrm>
-            <a:off x="340912" y="1249165"/>
-            <a:ext cx="11000096" cy="4401205"/>
-          </a:xfrm>
-          <a:prstGeom prst="rect">
-            <a:avLst/>
-          </a:prstGeom>
-          <a:noFill/>
-        </p:spPr>
-        <p:txBody>
-          <a:bodyPr wrap="square" rtlCol="0">
-            <a:spAutoFit/>
-          </a:bodyPr>
-          <a:lstStyle/>
-          <a:p>
-            <a:r>
-              <a:rPr lang="en-GB" sz="2000" dirty="0"/>
-              <a:t>A </a:t>
-            </a:r>
-            <a:r>
-              <a:rPr lang="en-GB" sz="2000" b="1" dirty="0"/>
-              <a:t>decision tree </a:t>
-            </a:r>
-            <a:r>
-              <a:rPr lang="en-GB" sz="2000" dirty="0"/>
-              <a:t>is a supervised machine learning algorithm used for classification and regression tasks. It models decisions and their possible consequences in a tree-like structure, where nodes represent features, branches represent decision rules, and leaves represent outcomes.</a:t>
-            </a:r>
-          </a:p>
-          <a:p>
-            <a:endParaRPr lang="en-GB" sz="2000" dirty="0"/>
-          </a:p>
-          <a:p>
-            <a:r>
-              <a:rPr lang="en-GB" sz="2000" dirty="0"/>
-              <a:t>Decision trees </a:t>
-            </a:r>
-            <a:r>
-              <a:rPr lang="en-GB" sz="2000" b="1" dirty="0"/>
-              <a:t>split data based on feature values</a:t>
-            </a:r>
-            <a:r>
-              <a:rPr lang="en-GB" sz="2000" dirty="0"/>
-              <a:t>, using criteria like Gini impurity or entropy (information gain) in classification, and mean squared error (MSE) in regression. They recursively divide the dataset into subsets to make predictions.</a:t>
-            </a:r>
-          </a:p>
-          <a:p>
-            <a:endParaRPr lang="en-GB" sz="2000" dirty="0"/>
-          </a:p>
-          <a:p>
-            <a:r>
-              <a:rPr lang="en-GB" sz="2000" dirty="0"/>
-              <a:t>They are </a:t>
-            </a:r>
-            <a:r>
-              <a:rPr lang="en-GB" sz="2000" b="1" dirty="0"/>
-              <a:t>interpretable</a:t>
-            </a:r>
-            <a:r>
-              <a:rPr lang="en-GB" sz="2000" dirty="0"/>
-              <a:t> and easy to understand but prone to </a:t>
-            </a:r>
-            <a:r>
-              <a:rPr lang="en-GB" sz="2000" b="1" dirty="0"/>
-              <a:t>overfitting</a:t>
-            </a:r>
-            <a:r>
-              <a:rPr lang="en-GB" sz="2000" dirty="0"/>
-              <a:t>, which can be mitigated by techniques like pruning or max depth limitation.</a:t>
-            </a:r>
-          </a:p>
-          <a:p>
-            <a:endParaRPr lang="en-GB" sz="2000" dirty="0"/>
-          </a:p>
-          <a:p>
-            <a:r>
-              <a:rPr lang="en-GB" sz="2000" dirty="0"/>
-              <a:t>The concept of decision trees dates back to the 1960s, with ID3 being a notable early algorithm introduced by Ross Quinlan in 1986.</a:t>
-            </a:r>
-          </a:p>
-          <a:p>
-            <a:endParaRPr lang="en-GB" sz="2000" dirty="0"/>
-          </a:p>
-        </p:txBody>
-      </p:sp>
-    </p:spTree>
-    <p:extLst>
-      <p:ext uri="{BB962C8B-B14F-4D97-AF65-F5344CB8AC3E}">
-        <p14:creationId xmlns:p14="http://schemas.microsoft.com/office/powerpoint/2010/main" val="2828702633"/>
-      </p:ext>
-    </p:extLst>
-  </p:cSld>
-  <p:clrMapOvr>
-    <a:masterClrMapping/>
-  </p:clrMapOvr>
-</p:sld>
-</file>
-
-<file path=ppt/slides/slide2.xml><?xml version="1.0" encoding="utf-8"?>
-<p:sld xmlns:a="http://schemas.openxmlformats.org/drawingml/2006/main" xmlns:r="http://schemas.openxmlformats.org/officeDocument/2006/relationships" xmlns:p="http://schemas.openxmlformats.org/presentationml/2006/main">
-  <p:cSld>
-    <p:spTree>
-      <p:nvGrpSpPr>
-        <p:cNvPr id="1" name="">
-          <a:extLst>
-            <a:ext uri="{FF2B5EF4-FFF2-40B4-BE49-F238E27FC236}">
               <a16:creationId xmlns:a16="http://schemas.microsoft.com/office/drawing/2014/main" id="{3315E504-BE3A-951D-A7D5-00AC6F134291}"/>
             </a:ext>
           </a:extLst>
@@ -4519,7 +4379,7 @@
         <p:spPr>
           <a:xfrm>
             <a:off x="241301" y="129804"/>
-            <a:ext cx="11747500" cy="523220"/>
+            <a:ext cx="11747500" cy="584775"/>
           </a:xfrm>
           <a:prstGeom prst="rect">
             <a:avLst/>
@@ -4533,13 +4393,15 @@
           <a:lstStyle/>
           <a:p>
             <a:r>
-              <a:rPr lang="en-US" sz="2800" dirty="0">
+              <a:rPr lang="en-US" sz="3200" b="1" dirty="0">
+                <a:latin typeface="Corbel" panose="020B0503020204020204" pitchFamily="34" charset="0"/>
                 <a:ea typeface="Lato" panose="020B0604020202020204" pitchFamily="34" charset="0"/>
                 <a:cs typeface="Helvetica" panose="020B0604020202020204" pitchFamily="34" charset="0"/>
               </a:rPr>
               <a:t>Iris dataset</a:t>
             </a:r>
-            <a:endParaRPr lang="en-GB" sz="2800" dirty="0">
+            <a:endParaRPr lang="en-GB" sz="3200" b="1" dirty="0">
+              <a:latin typeface="Corbel" panose="020B0503020204020204" pitchFamily="34" charset="0"/>
               <a:ea typeface="Lato" panose="020B0604020202020204" pitchFamily="34" charset="0"/>
               <a:cs typeface="Helvetica" panose="020B0604020202020204" pitchFamily="34" charset="0"/>
             </a:endParaRPr>
@@ -4717,7 +4579,7 @@
 </p:sld>
 </file>
 
-<file path=ppt/slides/slide3.xml><?xml version="1.0" encoding="utf-8"?>
+<file path=ppt/slides/slide2.xml><?xml version="1.0" encoding="utf-8"?>
 <p:sld xmlns:a="http://schemas.openxmlformats.org/drawingml/2006/main" xmlns:r="http://schemas.openxmlformats.org/officeDocument/2006/relationships" xmlns:p="http://schemas.openxmlformats.org/presentationml/2006/main">
   <p:cSld>
     <p:spTree>
@@ -4802,7 +4664,7 @@
         <p:spPr>
           <a:xfrm>
             <a:off x="241301" y="129804"/>
-            <a:ext cx="11747500" cy="523220"/>
+            <a:ext cx="11747500" cy="584775"/>
           </a:xfrm>
           <a:prstGeom prst="rect">
             <a:avLst/>
@@ -4816,13 +4678,15 @@
           <a:lstStyle/>
           <a:p>
             <a:r>
-              <a:rPr lang="en-US" sz="2800" dirty="0">
+              <a:rPr lang="en-US" sz="3200" b="1" dirty="0">
+                <a:latin typeface="Corbel" panose="020B0503020204020204" pitchFamily="34" charset="0"/>
                 <a:ea typeface="Lato" panose="020B0604020202020204" pitchFamily="34" charset="0"/>
                 <a:cs typeface="Helvetica" panose="020B0604020202020204" pitchFamily="34" charset="0"/>
               </a:rPr>
               <a:t>Decision tree</a:t>
             </a:r>
-            <a:endParaRPr lang="en-GB" sz="2800" dirty="0">
+            <a:endParaRPr lang="en-GB" sz="3200" b="1" dirty="0">
+              <a:latin typeface="Corbel" panose="020B0503020204020204" pitchFamily="34" charset="0"/>
               <a:ea typeface="Lato" panose="020B0604020202020204" pitchFamily="34" charset="0"/>
               <a:cs typeface="Helvetica" panose="020B0604020202020204" pitchFamily="34" charset="0"/>
             </a:endParaRPr>
@@ -4842,7 +4706,7 @@
 </p:sld>
 </file>
 
-<file path=ppt/slides/slide4.xml><?xml version="1.0" encoding="utf-8"?>
+<file path=ppt/slides/slide3.xml><?xml version="1.0" encoding="utf-8"?>
 <p:sld xmlns:a="http://schemas.openxmlformats.org/drawingml/2006/main" xmlns:r="http://schemas.openxmlformats.org/officeDocument/2006/relationships" xmlns:p="http://schemas.openxmlformats.org/presentationml/2006/main">
   <p:cSld>
     <p:spTree>
@@ -4880,7 +4744,7 @@
         <p:spPr>
           <a:xfrm>
             <a:off x="241301" y="129804"/>
-            <a:ext cx="11747500" cy="523220"/>
+            <a:ext cx="11747500" cy="553998"/>
           </a:xfrm>
           <a:prstGeom prst="rect">
             <a:avLst/>
@@ -4894,13 +4758,15 @@
           <a:lstStyle/>
           <a:p>
             <a:r>
-              <a:rPr lang="en-US" sz="2800" dirty="0">
+              <a:rPr lang="en-US" sz="3000" b="1" dirty="0">
+                <a:latin typeface="Corbel" panose="020B0503020204020204" pitchFamily="34" charset="0"/>
                 <a:ea typeface="Lato" panose="020B0604020202020204" pitchFamily="34" charset="0"/>
                 <a:cs typeface="Helvetica" panose="020B0604020202020204" pitchFamily="34" charset="0"/>
               </a:rPr>
-              <a:t>Decision tree</a:t>
-            </a:r>
-            <a:endParaRPr lang="en-GB" sz="2800" dirty="0">
+              <a:t>Decision tree formalization of the cost function</a:t>
+            </a:r>
+            <a:endParaRPr lang="en-GB" sz="3000" b="1" dirty="0">
+              <a:latin typeface="Corbel" panose="020B0503020204020204" pitchFamily="34" charset="0"/>
               <a:ea typeface="Lato" panose="020B0604020202020204" pitchFamily="34" charset="0"/>
               <a:cs typeface="Helvetica" panose="020B0604020202020204" pitchFamily="34" charset="0"/>
             </a:endParaRPr>
@@ -5016,7 +4882,7 @@
 </p:sld>
 </file>
 
-<file path=ppt/slides/slide5.xml><?xml version="1.0" encoding="utf-8"?>
+<file path=ppt/slides/slide4.xml><?xml version="1.0" encoding="utf-8"?>
 <p:sld xmlns:a="http://schemas.openxmlformats.org/drawingml/2006/main" xmlns:r="http://schemas.openxmlformats.org/officeDocument/2006/relationships" xmlns:p="http://schemas.openxmlformats.org/presentationml/2006/main">
   <p:cSld>
     <p:spTree>
@@ -5068,13 +4934,15 @@
           <a:lstStyle/>
           <a:p>
             <a:r>
-              <a:rPr lang="en-US" sz="2800" dirty="0">
+              <a:rPr lang="en-US" sz="2800" b="1" dirty="0">
+                <a:latin typeface="Corbel" panose="020B0503020204020204" pitchFamily="34" charset="0"/>
                 <a:ea typeface="Lato" panose="020B0604020202020204" pitchFamily="34" charset="0"/>
                 <a:cs typeface="Helvetica" panose="020B0604020202020204" pitchFamily="34" charset="0"/>
               </a:rPr>
-              <a:t>Decision tree</a:t>
-            </a:r>
-            <a:endParaRPr lang="en-GB" sz="2800" dirty="0">
+              <a:t>Decision tree formalization of the cost function</a:t>
+            </a:r>
+            <a:endParaRPr lang="en-GB" sz="2800" b="1" dirty="0">
+              <a:latin typeface="Corbel" panose="020B0503020204020204" pitchFamily="34" charset="0"/>
               <a:ea typeface="Lato" panose="020B0604020202020204" pitchFamily="34" charset="0"/>
               <a:cs typeface="Helvetica" panose="020B0604020202020204" pitchFamily="34" charset="0"/>
             </a:endParaRPr>
@@ -5201,7 +5069,7 @@
 </p:sld>
 </file>
 
-<file path=ppt/slides/slide6.xml><?xml version="1.0" encoding="utf-8"?>
+<file path=ppt/slides/slide5.xml><?xml version="1.0" encoding="utf-8"?>
 <p:sld xmlns:a="http://schemas.openxmlformats.org/drawingml/2006/main" xmlns:r="http://schemas.openxmlformats.org/officeDocument/2006/relationships" xmlns:p="http://schemas.openxmlformats.org/presentationml/2006/main">
   <p:cSld>
     <p:spTree>
@@ -5253,13 +5121,15 @@
           <a:lstStyle/>
           <a:p>
             <a:r>
-              <a:rPr lang="en-US" sz="2800" dirty="0">
+              <a:rPr lang="en-US" sz="2800" b="1" dirty="0">
+                <a:latin typeface="Corbel" panose="020B0503020204020204" pitchFamily="34" charset="0"/>
                 <a:ea typeface="Lato" panose="020B0604020202020204" pitchFamily="34" charset="0"/>
                 <a:cs typeface="Helvetica" panose="020B0604020202020204" pitchFamily="34" charset="0"/>
               </a:rPr>
-              <a:t>Decision tree</a:t>
-            </a:r>
-            <a:endParaRPr lang="en-GB" sz="2800" dirty="0">
+              <a:t>Decision tree formalization of the cost function</a:t>
+            </a:r>
+            <a:endParaRPr lang="en-GB" sz="2800" b="1" dirty="0">
+              <a:latin typeface="Corbel" panose="020B0503020204020204" pitchFamily="34" charset="0"/>
               <a:ea typeface="Lato" panose="020B0604020202020204" pitchFamily="34" charset="0"/>
               <a:cs typeface="Helvetica" panose="020B0604020202020204" pitchFamily="34" charset="0"/>
             </a:endParaRPr>
@@ -5457,7 +5327,7 @@
 </p:sld>
 </file>
 
-<file path=ppt/slides/slide7.xml><?xml version="1.0" encoding="utf-8"?>
+<file path=ppt/slides/slide6.xml><?xml version="1.0" encoding="utf-8"?>
 <p:sld xmlns:a="http://schemas.openxmlformats.org/drawingml/2006/main" xmlns:r="http://schemas.openxmlformats.org/officeDocument/2006/relationships" xmlns:p="http://schemas.openxmlformats.org/presentationml/2006/main">
   <p:cSld>
     <p:spTree>
@@ -5539,13 +5409,15 @@
           <a:lstStyle/>
           <a:p>
             <a:r>
-              <a:rPr lang="en-US" sz="2800" dirty="0">
+              <a:rPr lang="en-US" sz="2800" b="1" dirty="0">
+                <a:latin typeface="Corbel" panose="020B0503020204020204" pitchFamily="34" charset="0"/>
                 <a:ea typeface="Lato" panose="020B0604020202020204" pitchFamily="34" charset="0"/>
                 <a:cs typeface="Helvetica" panose="020B0604020202020204" pitchFamily="34" charset="0"/>
               </a:rPr>
-              <a:t>Decision tree</a:t>
-            </a:r>
-            <a:endParaRPr lang="en-GB" sz="2800" dirty="0">
+              <a:t>Decision tree formalization of the cost function</a:t>
+            </a:r>
+            <a:endParaRPr lang="en-GB" sz="2800" b="1" dirty="0">
+              <a:latin typeface="Corbel" panose="020B0503020204020204" pitchFamily="34" charset="0"/>
               <a:ea typeface="Lato" panose="020B0604020202020204" pitchFamily="34" charset="0"/>
               <a:cs typeface="Helvetica" panose="020B0604020202020204" pitchFamily="34" charset="0"/>
             </a:endParaRPr>
@@ -5713,7 +5585,7 @@
 </p:sld>
 </file>
 
-<file path=ppt/slides/slide8.xml><?xml version="1.0" encoding="utf-8"?>
+<file path=ppt/slides/slide7.xml><?xml version="1.0" encoding="utf-8"?>
 <p:sld xmlns:a="http://schemas.openxmlformats.org/drawingml/2006/main" xmlns:r="http://schemas.openxmlformats.org/officeDocument/2006/relationships" xmlns:p="http://schemas.openxmlformats.org/presentationml/2006/main">
   <p:cSld>
     <p:spTree>
@@ -5765,13 +5637,15 @@
           <a:lstStyle/>
           <a:p>
             <a:r>
-              <a:rPr lang="en-US" sz="2800" dirty="0">
+              <a:rPr lang="en-US" sz="2800" b="1" dirty="0">
+                <a:latin typeface="Corbel" panose="020B0503020204020204" pitchFamily="34" charset="0"/>
                 <a:ea typeface="Lato" panose="020B0604020202020204" pitchFamily="34" charset="0"/>
                 <a:cs typeface="Helvetica" panose="020B0604020202020204" pitchFamily="34" charset="0"/>
               </a:rPr>
-              <a:t>Decision tree</a:t>
-            </a:r>
-            <a:endParaRPr lang="en-GB" sz="2800" dirty="0">
+              <a:t>Decision tree formalization of the cost function</a:t>
+            </a:r>
+            <a:endParaRPr lang="en-GB" sz="2800" b="1" dirty="0">
+              <a:latin typeface="Corbel" panose="020B0503020204020204" pitchFamily="34" charset="0"/>
               <a:ea typeface="Lato" panose="020B0604020202020204" pitchFamily="34" charset="0"/>
               <a:cs typeface="Helvetica" panose="020B0604020202020204" pitchFamily="34" charset="0"/>
             </a:endParaRPr>
@@ -5969,7 +5843,7 @@
 </p:sld>
 </file>
 
-<file path=ppt/slides/slide9.xml><?xml version="1.0" encoding="utf-8"?>
+<file path=ppt/slides/slide8.xml><?xml version="1.0" encoding="utf-8"?>
 <p:sld xmlns:a="http://schemas.openxmlformats.org/drawingml/2006/main" xmlns:r="http://schemas.openxmlformats.org/officeDocument/2006/relationships" xmlns:p="http://schemas.openxmlformats.org/presentationml/2006/main">
   <p:cSld>
     <p:spTree>
@@ -6021,13 +5895,15 @@
           <a:lstStyle/>
           <a:p>
             <a:r>
-              <a:rPr lang="en-US" sz="2800" dirty="0">
+              <a:rPr lang="en-US" sz="2800" b="1" dirty="0">
+                <a:latin typeface="Corbel" panose="020B0503020204020204" pitchFamily="34" charset="0"/>
                 <a:ea typeface="Lato" panose="020B0604020202020204" pitchFamily="34" charset="0"/>
                 <a:cs typeface="Helvetica" panose="020B0604020202020204" pitchFamily="34" charset="0"/>
               </a:rPr>
-              <a:t>Decision tree</a:t>
-            </a:r>
-            <a:endParaRPr lang="en-GB" sz="2800" dirty="0">
+              <a:t>Decision tree formalization of the cost function</a:t>
+            </a:r>
+            <a:endParaRPr lang="en-GB" sz="2800" b="1" dirty="0">
+              <a:latin typeface="Corbel" panose="020B0503020204020204" pitchFamily="34" charset="0"/>
               <a:ea typeface="Lato" panose="020B0604020202020204" pitchFamily="34" charset="0"/>
               <a:cs typeface="Helvetica" panose="020B0604020202020204" pitchFamily="34" charset="0"/>
             </a:endParaRPr>
@@ -6056,7 +5932,7 @@
         </p:blipFill>
         <p:spPr>
           <a:xfrm>
-            <a:off x="2472648" y="224207"/>
+            <a:off x="2472648" y="780021"/>
             <a:ext cx="8811195" cy="3618653"/>
           </a:xfrm>
           <a:prstGeom prst="rect">
@@ -6086,7 +5962,7 @@
         </p:blipFill>
         <p:spPr>
           <a:xfrm>
-            <a:off x="329569" y="4312992"/>
+            <a:off x="329569" y="4868806"/>
             <a:ext cx="7767694" cy="1485911"/>
           </a:xfrm>
           <a:prstGeom prst="rect">
